--- a/PPTX_Files_Judging/ODlPP88.pptx
+++ b/PPTX_Files_Judging/ODlPP88.pptx
@@ -439,6 +439,70 @@
     </pc:docChg>
   </pc:docChgLst>
   <pc:docChgLst>
+    <pc:chgData name="Nasrin Nikravangolsefid" userId="S::nasrin.nikravangolsefid@samc.com::57dfdcc4-ba78-4f5b-8e42-2bfc3601f06b" providerId="AD" clId="Web-{4A123B69-7E2A-F248-AA0D-BF317DBC3D68}"/>
+    <pc:docChg chg="modSld">
+      <pc:chgData name="Nasrin Nikravangolsefid" userId="S::nasrin.nikravangolsefid@samc.com::57dfdcc4-ba78-4f5b-8e42-2bfc3601f06b" providerId="AD" clId="Web-{4A123B69-7E2A-F248-AA0D-BF317DBC3D68}" dt="2025-04-24T00:41:28.978" v="2" actId="20577"/>
+      <pc:docMkLst>
+        <pc:docMk/>
+      </pc:docMkLst>
+      <pc:sldChg chg="modSp">
+        <pc:chgData name="Nasrin Nikravangolsefid" userId="S::nasrin.nikravangolsefid@samc.com::57dfdcc4-ba78-4f5b-8e42-2bfc3601f06b" providerId="AD" clId="Web-{4A123B69-7E2A-F248-AA0D-BF317DBC3D68}" dt="2025-04-24T00:41:28.978" v="2" actId="20577"/>
+        <pc:sldMkLst>
+          <pc:docMk/>
+          <pc:sldMk cId="2928619675" sldId="261"/>
+        </pc:sldMkLst>
+        <pc:spChg chg="mod">
+          <ac:chgData name="Nasrin Nikravangolsefid" userId="S::nasrin.nikravangolsefid@samc.com::57dfdcc4-ba78-4f5b-8e42-2bfc3601f06b" providerId="AD" clId="Web-{4A123B69-7E2A-F248-AA0D-BF317DBC3D68}" dt="2025-04-24T00:41:28.978" v="2" actId="20577"/>
+          <ac:spMkLst>
+            <pc:docMk/>
+            <pc:sldMk cId="2928619675" sldId="261"/>
+            <ac:spMk id="8" creationId="{00000000-0000-0000-0000-000000000000}"/>
+          </ac:spMkLst>
+        </pc:spChg>
+        <pc:spChg chg="mod">
+          <ac:chgData name="Nasrin Nikravangolsefid" userId="S::nasrin.nikravangolsefid@samc.com::57dfdcc4-ba78-4f5b-8e42-2bfc3601f06b" providerId="AD" clId="Web-{4A123B69-7E2A-F248-AA0D-BF317DBC3D68}" dt="2025-04-24T00:41:16.681" v="1" actId="20577"/>
+          <ac:spMkLst>
+            <pc:docMk/>
+            <pc:sldMk cId="2928619675" sldId="261"/>
+            <ac:spMk id="74" creationId="{00000000-0000-0000-0000-000000000000}"/>
+          </ac:spMkLst>
+        </pc:spChg>
+      </pc:sldChg>
+    </pc:docChg>
+  </pc:docChgLst>
+  <pc:docChgLst>
+    <pc:chgData name="Nasrin Nikravangolsefid" userId="S::nasrin.nikravangolsefid@samc.com::57dfdcc4-ba78-4f5b-8e42-2bfc3601f06b" providerId="AD" clId="Web-{E8734430-8ED6-D72A-BCB4-80B1410EAF48}"/>
+    <pc:docChg chg="modSld">
+      <pc:chgData name="Nasrin Nikravangolsefid" userId="S::nasrin.nikravangolsefid@samc.com::57dfdcc4-ba78-4f5b-8e42-2bfc3601f06b" providerId="AD" clId="Web-{E8734430-8ED6-D72A-BCB4-80B1410EAF48}" dt="2025-04-01T18:09:52.435" v="3" actId="20577"/>
+      <pc:docMkLst>
+        <pc:docMk/>
+      </pc:docMkLst>
+      <pc:sldChg chg="modSp">
+        <pc:chgData name="Nasrin Nikravangolsefid" userId="S::nasrin.nikravangolsefid@samc.com::57dfdcc4-ba78-4f5b-8e42-2bfc3601f06b" providerId="AD" clId="Web-{E8734430-8ED6-D72A-BCB4-80B1410EAF48}" dt="2025-04-01T18:09:52.435" v="3" actId="20577"/>
+        <pc:sldMkLst>
+          <pc:docMk/>
+          <pc:sldMk cId="2928619675" sldId="261"/>
+        </pc:sldMkLst>
+        <pc:spChg chg="mod">
+          <ac:chgData name="Nasrin Nikravangolsefid" userId="S::nasrin.nikravangolsefid@samc.com::57dfdcc4-ba78-4f5b-8e42-2bfc3601f06b" providerId="AD" clId="Web-{E8734430-8ED6-D72A-BCB4-80B1410EAF48}" dt="2025-04-01T18:09:52.435" v="3" actId="20577"/>
+          <ac:spMkLst>
+            <pc:docMk/>
+            <pc:sldMk cId="2928619675" sldId="261"/>
+            <ac:spMk id="76" creationId="{00000000-0000-0000-0000-000000000000}"/>
+          </ac:spMkLst>
+        </pc:spChg>
+        <pc:spChg chg="mod">
+          <ac:chgData name="Nasrin Nikravangolsefid" userId="S::nasrin.nikravangolsefid@samc.com::57dfdcc4-ba78-4f5b-8e42-2bfc3601f06b" providerId="AD" clId="Web-{E8734430-8ED6-D72A-BCB4-80B1410EAF48}" dt="2025-04-01T18:08:22.432" v="1" actId="20577"/>
+          <ac:spMkLst>
+            <pc:docMk/>
+            <pc:sldMk cId="2928619675" sldId="261"/>
+            <ac:spMk id="84" creationId="{00000000-0000-0000-0000-000000000000}"/>
+          </ac:spMkLst>
+        </pc:spChg>
+      </pc:sldChg>
+    </pc:docChg>
+  </pc:docChgLst>
+  <pc:docChgLst>
     <pc:chgData name="Nasrin Nikravangolsefid" userId="S::nasrin.nikravangolsefid@samc.com::57dfdcc4-ba78-4f5b-8e42-2bfc3601f06b" providerId="AD" clId="Web-{6213643F-42BB-0835-7E9A-9F8CD9C1AE90}"/>
     <pc:docChg chg="modSld">
       <pc:chgData name="Nasrin Nikravangolsefid" userId="S::nasrin.nikravangolsefid@samc.com::57dfdcc4-ba78-4f5b-8e42-2bfc3601f06b" providerId="AD" clId="Web-{6213643F-42BB-0835-7E9A-9F8CD9C1AE90}" dt="2025-04-21T16:35:06.040" v="80" actId="20577"/>
@@ -563,70 +627,6 @@
             <ac:picMk id="32" creationId="{DAFB8C40-F85E-48CF-BF7E-4517D7D63025}"/>
           </ac:picMkLst>
         </pc:picChg>
-      </pc:sldChg>
-    </pc:docChg>
-  </pc:docChgLst>
-  <pc:docChgLst>
-    <pc:chgData name="Nasrin Nikravangolsefid" userId="S::nasrin.nikravangolsefid@samc.com::57dfdcc4-ba78-4f5b-8e42-2bfc3601f06b" providerId="AD" clId="Web-{E8734430-8ED6-D72A-BCB4-80B1410EAF48}"/>
-    <pc:docChg chg="modSld">
-      <pc:chgData name="Nasrin Nikravangolsefid" userId="S::nasrin.nikravangolsefid@samc.com::57dfdcc4-ba78-4f5b-8e42-2bfc3601f06b" providerId="AD" clId="Web-{E8734430-8ED6-D72A-BCB4-80B1410EAF48}" dt="2025-04-01T18:09:52.435" v="3" actId="20577"/>
-      <pc:docMkLst>
-        <pc:docMk/>
-      </pc:docMkLst>
-      <pc:sldChg chg="modSp">
-        <pc:chgData name="Nasrin Nikravangolsefid" userId="S::nasrin.nikravangolsefid@samc.com::57dfdcc4-ba78-4f5b-8e42-2bfc3601f06b" providerId="AD" clId="Web-{E8734430-8ED6-D72A-BCB4-80B1410EAF48}" dt="2025-04-01T18:09:52.435" v="3" actId="20577"/>
-        <pc:sldMkLst>
-          <pc:docMk/>
-          <pc:sldMk cId="2928619675" sldId="261"/>
-        </pc:sldMkLst>
-        <pc:spChg chg="mod">
-          <ac:chgData name="Nasrin Nikravangolsefid" userId="S::nasrin.nikravangolsefid@samc.com::57dfdcc4-ba78-4f5b-8e42-2bfc3601f06b" providerId="AD" clId="Web-{E8734430-8ED6-D72A-BCB4-80B1410EAF48}" dt="2025-04-01T18:09:52.435" v="3" actId="20577"/>
-          <ac:spMkLst>
-            <pc:docMk/>
-            <pc:sldMk cId="2928619675" sldId="261"/>
-            <ac:spMk id="76" creationId="{00000000-0000-0000-0000-000000000000}"/>
-          </ac:spMkLst>
-        </pc:spChg>
-        <pc:spChg chg="mod">
-          <ac:chgData name="Nasrin Nikravangolsefid" userId="S::nasrin.nikravangolsefid@samc.com::57dfdcc4-ba78-4f5b-8e42-2bfc3601f06b" providerId="AD" clId="Web-{E8734430-8ED6-D72A-BCB4-80B1410EAF48}" dt="2025-04-01T18:08:22.432" v="1" actId="20577"/>
-          <ac:spMkLst>
-            <pc:docMk/>
-            <pc:sldMk cId="2928619675" sldId="261"/>
-            <ac:spMk id="84" creationId="{00000000-0000-0000-0000-000000000000}"/>
-          </ac:spMkLst>
-        </pc:spChg>
-      </pc:sldChg>
-    </pc:docChg>
-  </pc:docChgLst>
-  <pc:docChgLst>
-    <pc:chgData name="Nasrin Nikravangolsefid" userId="S::nasrin.nikravangolsefid@samc.com::57dfdcc4-ba78-4f5b-8e42-2bfc3601f06b" providerId="AD" clId="Web-{4A123B69-7E2A-F248-AA0D-BF317DBC3D68}"/>
-    <pc:docChg chg="modSld">
-      <pc:chgData name="Nasrin Nikravangolsefid" userId="S::nasrin.nikravangolsefid@samc.com::57dfdcc4-ba78-4f5b-8e42-2bfc3601f06b" providerId="AD" clId="Web-{4A123B69-7E2A-F248-AA0D-BF317DBC3D68}" dt="2025-04-24T00:41:28.978" v="2" actId="20577"/>
-      <pc:docMkLst>
-        <pc:docMk/>
-      </pc:docMkLst>
-      <pc:sldChg chg="modSp">
-        <pc:chgData name="Nasrin Nikravangolsefid" userId="S::nasrin.nikravangolsefid@samc.com::57dfdcc4-ba78-4f5b-8e42-2bfc3601f06b" providerId="AD" clId="Web-{4A123B69-7E2A-F248-AA0D-BF317DBC3D68}" dt="2025-04-24T00:41:28.978" v="2" actId="20577"/>
-        <pc:sldMkLst>
-          <pc:docMk/>
-          <pc:sldMk cId="2928619675" sldId="261"/>
-        </pc:sldMkLst>
-        <pc:spChg chg="mod">
-          <ac:chgData name="Nasrin Nikravangolsefid" userId="S::nasrin.nikravangolsefid@samc.com::57dfdcc4-ba78-4f5b-8e42-2bfc3601f06b" providerId="AD" clId="Web-{4A123B69-7E2A-F248-AA0D-BF317DBC3D68}" dt="2025-04-24T00:41:28.978" v="2" actId="20577"/>
-          <ac:spMkLst>
-            <pc:docMk/>
-            <pc:sldMk cId="2928619675" sldId="261"/>
-            <ac:spMk id="8" creationId="{00000000-0000-0000-0000-000000000000}"/>
-          </ac:spMkLst>
-        </pc:spChg>
-        <pc:spChg chg="mod">
-          <ac:chgData name="Nasrin Nikravangolsefid" userId="S::nasrin.nikravangolsefid@samc.com::57dfdcc4-ba78-4f5b-8e42-2bfc3601f06b" providerId="AD" clId="Web-{4A123B69-7E2A-F248-AA0D-BF317DBC3D68}" dt="2025-04-24T00:41:16.681" v="1" actId="20577"/>
-          <ac:spMkLst>
-            <pc:docMk/>
-            <pc:sldMk cId="2928619675" sldId="261"/>
-            <ac:spMk id="74" creationId="{00000000-0000-0000-0000-000000000000}"/>
-          </ac:spMkLst>
-        </pc:spChg>
       </pc:sldChg>
     </pc:docChg>
   </pc:docChgLst>
@@ -799,30 +799,6 @@
     </pc:docChg>
   </pc:docChgLst>
   <pc:docChgLst>
-    <pc:chgData name="Nasrin Nikravangolsefid" userId="S::nasrin.nikravangolsefid@samc.com::57dfdcc4-ba78-4f5b-8e42-2bfc3601f06b" providerId="AD" clId="Web-{A136B2A1-75BC-E0CA-403F-0EC3656DEB99}"/>
-    <pc:docChg chg="modSld">
-      <pc:chgData name="Nasrin Nikravangolsefid" userId="S::nasrin.nikravangolsefid@samc.com::57dfdcc4-ba78-4f5b-8e42-2bfc3601f06b" providerId="AD" clId="Web-{A136B2A1-75BC-E0CA-403F-0EC3656DEB99}" dt="2025-04-24T00:52:03.925" v="2" actId="20577"/>
-      <pc:docMkLst>
-        <pc:docMk/>
-      </pc:docMkLst>
-      <pc:sldChg chg="modSp">
-        <pc:chgData name="Nasrin Nikravangolsefid" userId="S::nasrin.nikravangolsefid@samc.com::57dfdcc4-ba78-4f5b-8e42-2bfc3601f06b" providerId="AD" clId="Web-{A136B2A1-75BC-E0CA-403F-0EC3656DEB99}" dt="2025-04-24T00:52:03.925" v="2" actId="20577"/>
-        <pc:sldMkLst>
-          <pc:docMk/>
-          <pc:sldMk cId="2928619675" sldId="261"/>
-        </pc:sldMkLst>
-        <pc:spChg chg="mod">
-          <ac:chgData name="Nasrin Nikravangolsefid" userId="S::nasrin.nikravangolsefid@samc.com::57dfdcc4-ba78-4f5b-8e42-2bfc3601f06b" providerId="AD" clId="Web-{A136B2A1-75BC-E0CA-403F-0EC3656DEB99}" dt="2025-04-24T00:52:03.925" v="2" actId="20577"/>
-          <ac:spMkLst>
-            <pc:docMk/>
-            <pc:sldMk cId="2928619675" sldId="261"/>
-            <ac:spMk id="7" creationId="{00000000-0000-0000-0000-000000000000}"/>
-          </ac:spMkLst>
-        </pc:spChg>
-      </pc:sldChg>
-    </pc:docChg>
-  </pc:docChgLst>
-  <pc:docChgLst>
     <pc:chgData name="Nasrin Nikravangolsefid" userId="S::nasrin.nikravangolsefid@samc.com::57dfdcc4-ba78-4f5b-8e42-2bfc3601f06b" providerId="AD" clId="Web-{5BE258F5-2427-70FF-28EF-22C0CD690D03}"/>
     <pc:docChg chg="modSld">
       <pc:chgData name="Nasrin Nikravangolsefid" userId="S::nasrin.nikravangolsefid@samc.com::57dfdcc4-ba78-4f5b-8e42-2bfc3601f06b" providerId="AD" clId="Web-{5BE258F5-2427-70FF-28EF-22C0CD690D03}" dt="2025-04-23T23:25:24.534" v="10" actId="20577"/>
@@ -862,6 +838,30 @@
       </pc:sldChg>
     </pc:docChg>
   </pc:docChgLst>
+  <pc:docChgLst>
+    <pc:chgData name="Nasrin Nikravangolsefid" userId="S::nasrin.nikravangolsefid@samc.com::57dfdcc4-ba78-4f5b-8e42-2bfc3601f06b" providerId="AD" clId="Web-{A136B2A1-75BC-E0CA-403F-0EC3656DEB99}"/>
+    <pc:docChg chg="modSld">
+      <pc:chgData name="Nasrin Nikravangolsefid" userId="S::nasrin.nikravangolsefid@samc.com::57dfdcc4-ba78-4f5b-8e42-2bfc3601f06b" providerId="AD" clId="Web-{A136B2A1-75BC-E0CA-403F-0EC3656DEB99}" dt="2025-04-24T00:52:03.925" v="2" actId="20577"/>
+      <pc:docMkLst>
+        <pc:docMk/>
+      </pc:docMkLst>
+      <pc:sldChg chg="modSp">
+        <pc:chgData name="Nasrin Nikravangolsefid" userId="S::nasrin.nikravangolsefid@samc.com::57dfdcc4-ba78-4f5b-8e42-2bfc3601f06b" providerId="AD" clId="Web-{A136B2A1-75BC-E0CA-403F-0EC3656DEB99}" dt="2025-04-24T00:52:03.925" v="2" actId="20577"/>
+        <pc:sldMkLst>
+          <pc:docMk/>
+          <pc:sldMk cId="2928619675" sldId="261"/>
+        </pc:sldMkLst>
+        <pc:spChg chg="mod">
+          <ac:chgData name="Nasrin Nikravangolsefid" userId="S::nasrin.nikravangolsefid@samc.com::57dfdcc4-ba78-4f5b-8e42-2bfc3601f06b" providerId="AD" clId="Web-{A136B2A1-75BC-E0CA-403F-0EC3656DEB99}" dt="2025-04-24T00:52:03.925" v="2" actId="20577"/>
+          <ac:spMkLst>
+            <pc:docMk/>
+            <pc:sldMk cId="2928619675" sldId="261"/>
+            <ac:spMk id="7" creationId="{00000000-0000-0000-0000-000000000000}"/>
+          </ac:spMkLst>
+        </pc:spChg>
+      </pc:sldChg>
+    </pc:docChg>
+  </pc:docChgLst>
 </pc:chgInfo>
 </file>
 
@@ -947,7 +947,7 @@
           <a:p>
             <a:fld id="{78A783DE-3B5E-4848-9DD3-8469EAB31C91}" type="datetimeFigureOut">
               <a:rPr lang="en-US" smtClean="0"/>
-              <a:t>4/24/25</a:t>
+              <a:t>5/3/25</a:t>
             </a:fld>
             <a:endParaRPr lang="en-US"/>
           </a:p>
@@ -1432,7 +1432,7 @@
           <a:p>
             <a:fld id="{070F9D74-9CA2-B844-957F-EDF408B27601}" type="datetimeFigureOut">
               <a:rPr lang="en-US" smtClean="0"/>
-              <a:t>4/24/25</a:t>
+              <a:t>5/3/25</a:t>
             </a:fld>
             <a:endParaRPr lang="en-US"/>
           </a:p>
@@ -1600,7 +1600,7 @@
           <a:p>
             <a:fld id="{070F9D74-9CA2-B844-957F-EDF408B27601}" type="datetimeFigureOut">
               <a:rPr lang="en-US" smtClean="0"/>
-              <a:t>4/24/25</a:t>
+              <a:t>5/3/25</a:t>
             </a:fld>
             <a:endParaRPr lang="en-US"/>
           </a:p>
@@ -1778,7 +1778,7 @@
           <a:p>
             <a:fld id="{070F9D74-9CA2-B844-957F-EDF408B27601}" type="datetimeFigureOut">
               <a:rPr lang="en-US" smtClean="0"/>
-              <a:t>4/24/25</a:t>
+              <a:t>5/3/25</a:t>
             </a:fld>
             <a:endParaRPr lang="en-US"/>
           </a:p>
@@ -2230,7 +2230,7 @@
           <a:p>
             <a:fld id="{070F9D74-9CA2-B844-957F-EDF408B27601}" type="datetimeFigureOut">
               <a:rPr lang="en-US" smtClean="0"/>
-              <a:t>4/24/25</a:t>
+              <a:t>5/3/25</a:t>
             </a:fld>
             <a:endParaRPr lang="en-US"/>
           </a:p>
@@ -2473,7 +2473,7 @@
           <a:p>
             <a:fld id="{070F9D74-9CA2-B844-957F-EDF408B27601}" type="datetimeFigureOut">
               <a:rPr lang="en-US" smtClean="0"/>
-              <a:t>4/24/25</a:t>
+              <a:t>5/3/25</a:t>
             </a:fld>
             <a:endParaRPr lang="en-US"/>
           </a:p>
@@ -2702,7 +2702,7 @@
           <a:p>
             <a:fld id="{070F9D74-9CA2-B844-957F-EDF408B27601}" type="datetimeFigureOut">
               <a:rPr lang="en-US" smtClean="0"/>
-              <a:t>4/24/25</a:t>
+              <a:t>5/3/25</a:t>
             </a:fld>
             <a:endParaRPr lang="en-US"/>
           </a:p>
@@ -3066,7 +3066,7 @@
           <a:p>
             <a:fld id="{070F9D74-9CA2-B844-957F-EDF408B27601}" type="datetimeFigureOut">
               <a:rPr lang="en-US" smtClean="0"/>
-              <a:t>4/24/25</a:t>
+              <a:t>5/3/25</a:t>
             </a:fld>
             <a:endParaRPr lang="en-US"/>
           </a:p>
@@ -3183,7 +3183,7 @@
           <a:p>
             <a:fld id="{070F9D74-9CA2-B844-957F-EDF408B27601}" type="datetimeFigureOut">
               <a:rPr lang="en-US" smtClean="0"/>
-              <a:t>4/24/25</a:t>
+              <a:t>5/3/25</a:t>
             </a:fld>
             <a:endParaRPr lang="en-US"/>
           </a:p>
@@ -3278,7 +3278,7 @@
           <a:p>
             <a:fld id="{070F9D74-9CA2-B844-957F-EDF408B27601}" type="datetimeFigureOut">
               <a:rPr lang="en-US" smtClean="0"/>
-              <a:t>4/24/25</a:t>
+              <a:t>5/3/25</a:t>
             </a:fld>
             <a:endParaRPr lang="en-US"/>
           </a:p>
@@ -3553,7 +3553,7 @@
           <a:p>
             <a:fld id="{070F9D74-9CA2-B844-957F-EDF408B27601}" type="datetimeFigureOut">
               <a:rPr lang="en-US" smtClean="0"/>
-              <a:t>4/24/25</a:t>
+              <a:t>5/3/25</a:t>
             </a:fld>
             <a:endParaRPr lang="en-US"/>
           </a:p>
@@ -3808,7 +3808,7 @@
           <a:p>
             <a:fld id="{070F9D74-9CA2-B844-957F-EDF408B27601}" type="datetimeFigureOut">
               <a:rPr lang="en-US" smtClean="0"/>
-              <a:t>4/24/25</a:t>
+              <a:t>5/3/25</a:t>
             </a:fld>
             <a:endParaRPr lang="en-US"/>
           </a:p>
@@ -4019,7 +4019,7 @@
           <a:p>
             <a:fld id="{070F9D74-9CA2-B844-957F-EDF408B27601}" type="datetimeFigureOut">
               <a:rPr lang="en-US" smtClean="0"/>
-              <a:t>4/24/25</a:t>
+              <a:t>5/3/25</a:t>
             </a:fld>
             <a:endParaRPr lang="en-US"/>
           </a:p>
@@ -6329,6 +6329,30 @@
           </a:p>
         </p:txBody>
       </p:sp>
+      <p:pic>
+        <p:nvPicPr>
+          <p:cNvPr id="93" name="Picture 92" descr="60C.png"/>
+          <p:cNvPicPr>
+            <a:picLocks noChangeAspect="1"/>
+          </p:cNvPicPr>
+          <p:nvPr/>
+        </p:nvPicPr>
+        <p:blipFill>
+          <a:blip r:embed="rId8"/>
+          <a:stretch>
+            <a:fillRect/>
+          </a:stretch>
+        </p:blipFill>
+        <p:spPr>
+          <a:xfrm>
+            <a:off x="29279088" y="795528"/>
+            <a:ext cx="2103120" cy="3108960"/>
+          </a:xfrm>
+          <a:prstGeom prst="rect">
+            <a:avLst/>
+          </a:prstGeom>
+        </p:spPr>
+      </p:pic>
     </p:spTree>
     <p:extLst>
       <p:ext uri="{BB962C8B-B14F-4D97-AF65-F5344CB8AC3E}">
